--- a/lecons/LSA/Biogeography/02_LSA_BIO_L02_Physical_Properties_of_the_Soil_Texture.pptx
+++ b/lecons/LSA/Biogeography/02_LSA_BIO_L02_Physical_Properties_of_the_Soil_Texture.pptx
@@ -13688,7 +13688,7 @@
               <a:buNone/>
             </a:pPr>
             <a:r>
-              <a:rPr lang="en-US" sz="4000" b="1" dirty="0">
+              <a:rPr lang="en-US" sz="3200" b="1" dirty="0">
                 <a:solidFill>
                   <a:srgbClr val="111111"/>
                 </a:solidFill>
@@ -13698,7 +13698,7 @@
               </a:rPr>
               <a:t>Topic: Soil and its Properties</a:t>
             </a:r>
-            <a:endParaRPr lang="en-US" sz="4000" dirty="0"/>
+            <a:endParaRPr lang="en-US" sz="3200" dirty="0"/>
           </a:p>
           <a:p>
             <a:pPr algn="l" indent="0" marL="0">
@@ -13708,7 +13708,7 @@
               <a:buNone/>
             </a:pPr>
             <a:r>
-              <a:rPr lang="en-US" sz="4000" b="1" dirty="0">
+              <a:rPr lang="en-US" sz="3200" b="1" dirty="0">
                 <a:solidFill>
                   <a:srgbClr val="111111"/>
                 </a:solidFill>
@@ -13718,7 +13718,7 @@
               </a:rPr>
               <a:t>Sub-topic: Soil Properties and their Significance</a:t>
             </a:r>
-            <a:endParaRPr lang="en-US" sz="4000" dirty="0"/>
+            <a:endParaRPr lang="en-US" sz="3200" dirty="0"/>
           </a:p>
           <a:p>
             <a:pPr algn="l" indent="0" marL="0">
@@ -13728,7 +13728,7 @@
               <a:buNone/>
             </a:pPr>
             <a:r>
-              <a:rPr lang="en-US" sz="4000" b="1" dirty="0">
+              <a:rPr lang="en-US" sz="3200" b="1" dirty="0">
                 <a:solidFill>
                   <a:srgbClr val="990011"/>
                 </a:solidFill>
@@ -13738,7 +13738,7 @@
               </a:rPr>
               <a:t>Lesson 2: Physical Properties of the Soil: Texture</a:t>
             </a:r>
-            <a:endParaRPr lang="en-US" sz="4000" dirty="0"/>
+            <a:endParaRPr lang="en-US" sz="3200" dirty="0"/>
           </a:p>
         </p:txBody>
       </p:sp>
